--- a/docs/산출물_20260904/07_WCS_구성도_및_흐름도.pptx
+++ b/docs/산출물_20260904/07_WCS_구성도_및_흐름도.pptx
@@ -13079,7 +13079,7 @@
                 </a:solidFill>
                 <a:latin typeface="맑은 고딕"/>
               </a:rPr>
-              <a:t>설비 에러는 상위에 보고하고, 상위의 재지정을 받아 이어서 진행한다.</a:t>
+              <a:t>이중입고는 상위가 위치를 재지정하고, 공출고는 재지정 없이 양쪽에서 작업을 삭제한다.</a:t>
             </a:r>
           </a:p>
         </p:txBody>
@@ -13092,7 +13092,7 @@
         </p:nvSpPr>
         <p:spPr>
           <a:xfrm>
-            <a:off x="640080" y="1143000"/>
+            <a:off x="640080" y="1097280"/>
             <a:ext cx="5394960" cy="365760"/>
           </a:xfrm>
           <a:prstGeom prst="rect">
@@ -13127,8 +13127,8 @@
         </p:nvSpPr>
         <p:spPr>
           <a:xfrm>
-            <a:off x="822960" y="1554480"/>
-            <a:ext cx="5212080" cy="365760"/>
+            <a:off x="822960" y="1481328"/>
+            <a:ext cx="5212080" cy="292608"/>
           </a:xfrm>
           <a:prstGeom prst="rect">
             <a:avLst/>
@@ -13143,13 +13143,13 @@
           <a:p>
             <a:pPr algn="l"/>
             <a:r>
-              <a:rPr sz="1100" b="0">
-                <a:solidFill>
-                  <a:srgbClr val="595959"/>
-                </a:solidFill>
-                <a:latin typeface="맑은 고딕"/>
-              </a:rPr>
-              <a:t>① 크레인이 셀에 넣지 못하고 에러 54 발생 (화물은 실은 채)</a:t>
+              <a:rPr sz="1050" b="1">
+                <a:solidFill>
+                  <a:srgbClr val="266EBE"/>
+                </a:solidFill>
+                <a:latin typeface="맑은 고딕"/>
+              </a:rPr>
+              <a:t>→ 상위가 R 전문으로 다른 셀을 내려 준다 (재지정 있음)</a:t>
             </a:r>
           </a:p>
         </p:txBody>
@@ -13162,8 +13162,8 @@
         </p:nvSpPr>
         <p:spPr>
           <a:xfrm>
-            <a:off x="822960" y="1938528"/>
-            <a:ext cx="5212080" cy="365760"/>
+            <a:off x="822960" y="1874519"/>
+            <a:ext cx="5212080" cy="347472"/>
           </a:xfrm>
           <a:prstGeom prst="rect">
             <a:avLst/>
@@ -13184,7 +13184,7 @@
                 </a:solidFill>
                 <a:latin typeface="맑은 고딕"/>
               </a:rPr>
-              <a:t>② 설비 통신이 에러를 DB 에 기록 → 상위 E 전문 보고</a:t>
+              <a:t>① 크레인이 셀에 넣지 못하고 에러 54 발생 (화물은 실은 채)</a:t>
             </a:r>
           </a:p>
         </p:txBody>
@@ -13197,8 +13197,8 @@
         </p:nvSpPr>
         <p:spPr>
           <a:xfrm>
-            <a:off x="822960" y="2322576"/>
-            <a:ext cx="5212080" cy="365760"/>
+            <a:off x="822960" y="2240279"/>
+            <a:ext cx="5212080" cy="347472"/>
           </a:xfrm>
           <a:prstGeom prst="rect">
             <a:avLst/>
@@ -13219,7 +13219,7 @@
                 </a:solidFill>
                 <a:latin typeface="맑은 고딕"/>
               </a:rPr>
-              <a:t>③ 운전자가 크레인 에러 해제</a:t>
+              <a:t>② WCS 가 E 전문 보고 (ErrorKind=1, 작업번호 · 도착 셀)</a:t>
             </a:r>
           </a:p>
         </p:txBody>
@@ -13232,8 +13232,8 @@
         </p:nvSpPr>
         <p:spPr>
           <a:xfrm>
-            <a:off x="822960" y="2706624"/>
-            <a:ext cx="5212080" cy="365760"/>
+            <a:off x="822960" y="2606039"/>
+            <a:ext cx="5212080" cy="347472"/>
           </a:xfrm>
           <a:prstGeom prst="rect">
             <a:avLst/>
@@ -13254,7 +13254,7 @@
                 </a:solidFill>
                 <a:latin typeface="맑은 고딕"/>
               </a:rPr>
-              <a:t>④ 상위가 새 셀로 재지정 (O 전문)</a:t>
+              <a:t>③ 상위가 같은 호기의 다른 셀로 R 전문(R_Kind=1) 재지정</a:t>
             </a:r>
           </a:p>
         </p:txBody>
@@ -13267,8 +13267,8 @@
         </p:nvSpPr>
         <p:spPr>
           <a:xfrm>
-            <a:off x="822960" y="3090672"/>
-            <a:ext cx="5212080" cy="365760"/>
+            <a:off x="822960" y="2971800"/>
+            <a:ext cx="5212080" cy="347472"/>
           </a:xfrm>
           <a:prstGeom prst="rect">
             <a:avLst/>
@@ -13289,7 +13289,7 @@
                 </a:solidFill>
                 <a:latin typeface="맑은 고딕"/>
               </a:rPr>
-              <a:t>⑤ 크레인 재지시 → 정상 입고 완료</a:t>
+              <a:t>④ WCS 가 작업을 재지정 상태로 바꾸고 새 셀로 크레인 재지시</a:t>
             </a:r>
           </a:p>
         </p:txBody>
@@ -13302,8 +13302,8 @@
         </p:nvSpPr>
         <p:spPr>
           <a:xfrm>
-            <a:off x="6355080" y="1143000"/>
-            <a:ext cx="5394960" cy="365760"/>
+            <a:off x="822960" y="3337560"/>
+            <a:ext cx="5212080" cy="347472"/>
           </a:xfrm>
           <a:prstGeom prst="rect">
             <a:avLst/>
@@ -13318,13 +13318,13 @@
           <a:p>
             <a:pPr algn="l"/>
             <a:r>
-              <a:rPr sz="1300" b="1">
-                <a:solidFill>
-                  <a:srgbClr val="1E2761"/>
-                </a:solidFill>
-                <a:latin typeface="맑은 고딕"/>
-              </a:rPr>
-              <a:t>■ 공출고 (에러 58) — 출고 출발 셀이 비어 있음</a:t>
+              <a:rPr sz="1100" b="0">
+                <a:solidFill>
+                  <a:srgbClr val="595959"/>
+                </a:solidFill>
+                <a:latin typeface="맑은 고딕"/>
+              </a:rPr>
+              <a:t>⑤ 크레인이 새 지시를 받아 정상 입고 완료</a:t>
             </a:r>
           </a:p>
         </p:txBody>
@@ -13337,8 +13337,8 @@
         </p:nvSpPr>
         <p:spPr>
           <a:xfrm>
-            <a:off x="6537960" y="1554480"/>
-            <a:ext cx="5212080" cy="365760"/>
+            <a:off x="6355080" y="1097280"/>
+            <a:ext cx="5394960" cy="365760"/>
           </a:xfrm>
           <a:prstGeom prst="rect">
             <a:avLst/>
@@ -13353,13 +13353,13 @@
           <a:p>
             <a:pPr algn="l"/>
             <a:r>
-              <a:rPr sz="1100" b="0">
-                <a:solidFill>
-                  <a:srgbClr val="595959"/>
-                </a:solidFill>
-                <a:latin typeface="맑은 고딕"/>
-              </a:rPr>
-              <a:t>① 크레인이 셀에서 집지 못하고 에러 58 발생 (빈 포크)</a:t>
+              <a:rPr sz="1300" b="1">
+                <a:solidFill>
+                  <a:srgbClr val="1E2761"/>
+                </a:solidFill>
+                <a:latin typeface="맑은 고딕"/>
+              </a:rPr>
+              <a:t>■ 공출고 (에러 58) — 출고 출발 셀이 비어 있음</a:t>
             </a:r>
           </a:p>
         </p:txBody>
@@ -13372,8 +13372,8 @@
         </p:nvSpPr>
         <p:spPr>
           <a:xfrm>
-            <a:off x="6537960" y="1938528"/>
-            <a:ext cx="5212080" cy="365760"/>
+            <a:off x="6537960" y="1481328"/>
+            <a:ext cx="5212080" cy="292608"/>
           </a:xfrm>
           <a:prstGeom prst="rect">
             <a:avLst/>
@@ -13388,13 +13388,13 @@
           <a:p>
             <a:pPr algn="l"/>
             <a:r>
-              <a:rPr sz="1100" b="0">
-                <a:solidFill>
-                  <a:srgbClr val="595959"/>
-                </a:solidFill>
-                <a:latin typeface="맑은 고딕"/>
-              </a:rPr>
-              <a:t>② 설비 통신이 에러를 DB 에 기록 → 상위 E 전문 보고</a:t>
+              <a:rPr sz="1050" b="1">
+                <a:solidFill>
+                  <a:srgbClr val="C87A0E"/>
+                </a:solidFill>
+                <a:latin typeface="맑은 고딕"/>
+              </a:rPr>
+              <a:t>→ 재지정이 없다. 양쪽에서 작업을 삭제한다</a:t>
             </a:r>
           </a:p>
         </p:txBody>
@@ -13407,8 +13407,8 @@
         </p:nvSpPr>
         <p:spPr>
           <a:xfrm>
-            <a:off x="6537960" y="2322576"/>
-            <a:ext cx="5212080" cy="365760"/>
+            <a:off x="6537960" y="1874519"/>
+            <a:ext cx="5212080" cy="347472"/>
           </a:xfrm>
           <a:prstGeom prst="rect">
             <a:avLst/>
@@ -13429,7 +13429,7 @@
                 </a:solidFill>
                 <a:latin typeface="맑은 고딕"/>
               </a:rPr>
-              <a:t>③ 운전자가 크레인 에러 해제 · 필요 시 지시 삭제</a:t>
+              <a:t>① 크레인이 셀에서 집지 못하고 에러 58 발생 (빈 포크)</a:t>
             </a:r>
           </a:p>
         </p:txBody>
@@ -13442,8 +13442,8 @@
         </p:nvSpPr>
         <p:spPr>
           <a:xfrm>
-            <a:off x="6537960" y="2706624"/>
-            <a:ext cx="5212080" cy="365760"/>
+            <a:off x="6537960" y="2240279"/>
+            <a:ext cx="5212080" cy="347472"/>
           </a:xfrm>
           <a:prstGeom prst="rect">
             <a:avLst/>
@@ -13464,7 +13464,7 @@
                 </a:solidFill>
                 <a:latin typeface="맑은 고딕"/>
               </a:rPr>
-              <a:t>④ 상위가 다른 셀로 재지정 (O 전문)</a:t>
+              <a:t>② WCS 가 E 전문 보고 (ErrorKind=3, 작업번호 · 출발 셀)</a:t>
             </a:r>
           </a:p>
         </p:txBody>
@@ -13477,8 +13477,8 @@
         </p:nvSpPr>
         <p:spPr>
           <a:xfrm>
-            <a:off x="6537960" y="3090672"/>
-            <a:ext cx="5212080" cy="365760"/>
+            <a:off x="6537960" y="2606039"/>
+            <a:ext cx="5212080" cy="347472"/>
           </a:xfrm>
           <a:prstGeom prst="rect">
             <a:avLst/>
@@ -13499,7 +13499,7 @@
                 </a:solidFill>
                 <a:latin typeface="맑은 고딕"/>
               </a:rPr>
-              <a:t>⑤ 크레인 재지시 → 정상 출고 완료</a:t>
+              <a:t>③ 상위(IMS)가 그 작업을 삭제한다 (담당자 확인 후)</a:t>
             </a:r>
           </a:p>
         </p:txBody>
@@ -13512,8 +13512,8 @@
         </p:nvSpPr>
         <p:spPr>
           <a:xfrm>
-            <a:off x="640080" y="3657600"/>
-            <a:ext cx="11064240" cy="365760"/>
+            <a:off x="6537960" y="2971800"/>
+            <a:ext cx="5212080" cy="347472"/>
           </a:xfrm>
           <a:prstGeom prst="rect">
             <a:avLst/>
@@ -13528,6 +13528,155 @@
           <a:p>
             <a:pPr algn="l"/>
             <a:r>
+              <a:rPr sz="1100" b="0">
+                <a:solidFill>
+                  <a:srgbClr val="595959"/>
+                </a:solidFill>
+                <a:latin typeface="맑은 고딕"/>
+              </a:rPr>
+              <a:t>④ 운전자가 WCS [작업정보] 에서 같은 작업을 삭제 (확인 후)</a:t>
+            </a:r>
+          </a:p>
+        </p:txBody>
+      </p:sp>
+      <p:sp>
+        <p:nvSpPr>
+          <p:cNvPr id="17" name="TextBox 16"/>
+          <p:cNvSpPr txBox="1"/>
+          <p:nvPr/>
+        </p:nvSpPr>
+        <p:spPr>
+          <a:xfrm>
+            <a:off x="6537960" y="3337560"/>
+            <a:ext cx="5212080" cy="347472"/>
+          </a:xfrm>
+          <a:prstGeom prst="rect">
+            <a:avLst/>
+          </a:prstGeom>
+          <a:noFill/>
+        </p:spPr>
+        <p:txBody>
+          <a:bodyPr wrap="square" anchor="t" lIns="36576" rIns="36576" tIns="0" bIns="0">
+            <a:spAutoFit/>
+          </a:bodyPr>
+          <a:lstStyle/>
+          <a:p>
+            <a:pPr algn="l"/>
+            <a:r>
+              <a:rPr sz="1100" b="0">
+                <a:solidFill>
+                  <a:srgbClr val="595959"/>
+                </a:solidFill>
+                <a:latin typeface="맑은 고딕"/>
+              </a:rPr>
+              <a:t>⑤ 재고가 실제로 있는 셀로 상위가 새 출고를 지시</a:t>
+            </a:r>
+          </a:p>
+        </p:txBody>
+      </p:sp>
+      <p:sp>
+        <p:nvSpPr>
+          <p:cNvPr id="18" name="Rounded Rectangle 17"/>
+          <p:cNvSpPr/>
+          <p:nvPr/>
+        </p:nvSpPr>
+        <p:spPr>
+          <a:xfrm>
+            <a:off x="640080" y="3767328"/>
+            <a:ext cx="11109960" cy="786384"/>
+          </a:xfrm>
+          <a:prstGeom prst="roundRect">
+            <a:avLst/>
+          </a:prstGeom>
+          <a:solidFill>
+            <a:srgbClr val="EEF1F7"/>
+          </a:solidFill>
+          <a:ln w="15875">
+            <a:solidFill>
+              <a:srgbClr val="1E2761"/>
+            </a:solidFill>
+          </a:ln>
+          <a:effectLst/>
+        </p:spPr>
+        <p:style>
+          <a:lnRef idx="1">
+            <a:schemeClr val="accent1"/>
+          </a:lnRef>
+          <a:fillRef idx="3">
+            <a:schemeClr val="accent1"/>
+          </a:fillRef>
+          <a:effectRef idx="2">
+            <a:schemeClr val="accent1"/>
+          </a:effectRef>
+          <a:fontRef idx="minor">
+            <a:schemeClr val="lt1"/>
+          </a:fontRef>
+        </p:style>
+        <p:txBody>
+          <a:bodyPr rtlCol="0" anchor="ctr" wrap="square" lIns="36576" rIns="36576" tIns="0" bIns="0"/>
+          <a:lstStyle/>
+          <a:p>
+            <a:pPr algn="ctr"/>
+            <a:r>
+              <a:rPr sz="1150" b="1">
+                <a:solidFill>
+                  <a:srgbClr val="1E2761"/>
+                </a:solidFill>
+                <a:latin typeface="맑은 고딕"/>
+              </a:rPr>
+              <a:t>설비 에러 해제는 운전 화면의 기능이 아니다</a:t>
+            </a:r>
+          </a:p>
+          <a:p>
+            <a:pPr algn="ctr"/>
+            <a:r>
+              <a:rPr sz="1050" b="0">
+                <a:solidFill>
+                  <a:srgbClr val="595959"/>
+                </a:solidFill>
+                <a:latin typeface="맑은 고딕"/>
+              </a:rPr>
+              <a:t>구 ECS 에도 S/C · RGV 에러를 해제하는 화면 기능은 없다. 설비에서 알람이 해제되면 설비가 AlarmResetReport 로 알리고 ECS 는 Ack 만 한다.</a:t>
+            </a:r>
+          </a:p>
+          <a:p>
+            <a:pPr algn="ctr"/>
+            <a:r>
+              <a:rPr sz="1050" b="0">
+                <a:solidFill>
+                  <a:srgbClr val="595959"/>
+                </a:solidFill>
+                <a:latin typeface="맑은 고딕"/>
+              </a:rPr>
+              <a:t>(참고) 구 ECS 소스에서 R 전문은 ACK 만 하고 실제 위치 변경 코드가 없다. 재지정 동작은 현행 WCS 에서 구현했다.</a:t>
+            </a:r>
+          </a:p>
+        </p:txBody>
+      </p:sp>
+      <p:sp>
+        <p:nvSpPr>
+          <p:cNvPr id="19" name="TextBox 18"/>
+          <p:cNvSpPr txBox="1"/>
+          <p:nvPr/>
+        </p:nvSpPr>
+        <p:spPr>
+          <a:xfrm>
+            <a:off x="640080" y="4663440"/>
+            <a:ext cx="11064240" cy="365760"/>
+          </a:xfrm>
+          <a:prstGeom prst="rect">
+            <a:avLst/>
+          </a:prstGeom>
+          <a:noFill/>
+        </p:spPr>
+        <p:txBody>
+          <a:bodyPr wrap="square" anchor="t" lIns="36576" rIns="36576" tIns="0" bIns="0">
+            <a:spAutoFit/>
+          </a:bodyPr>
+          <a:lstStyle/>
+          <a:p>
+            <a:pPr algn="l"/>
+            <a:r>
               <a:rPr sz="1300" b="1">
                 <a:solidFill>
                   <a:srgbClr val="1E2761"/>
@@ -13541,15 +13690,15 @@
       </p:sp>
       <p:graphicFrame>
         <p:nvGraphicFramePr>
-          <p:cNvPr id="17" name="Table 16"/>
+          <p:cNvPr id="20" name="Table 19"/>
           <p:cNvGraphicFramePr>
             <a:graphicFrameLocks noGrp="1"/>
           </p:cNvGraphicFramePr>
           <p:nvPr/>
         </p:nvGraphicFramePr>
         <p:xfrm>
-          <a:off x="640080" y="4069080"/>
-          <a:ext cx="11064240" cy="1828800"/>
+          <a:off x="640080" y="4983480"/>
+          <a:ext cx="11064240" cy="1325880"/>
         </p:xfrm>
         <a:graphic>
           <a:graphicData uri="http://schemas.openxmlformats.org/drawingml/2006/table">
@@ -13561,14 +13710,14 @@
                 <a:gridCol w="3931920"/>
                 <a:gridCol w="7132320"/>
               </a:tblGrid>
-              <a:tr h="365760">
+              <a:tr h="265176">
                 <a:tc>
                   <a:txBody>
                     <a:bodyPr/>
                     <a:lstStyle/>
                     <a:p>
                       <a:r>
-                        <a:rPr sz="1050" b="1">
+                        <a:rPr sz="1000" b="1">
                           <a:solidFill>
                             <a:srgbClr val="FFFFFF"/>
                           </a:solidFill>
@@ -13590,7 +13739,7 @@
                     <a:lstStyle/>
                     <a:p>
                       <a:r>
-                        <a:rPr sz="1050" b="1">
+                        <a:rPr sz="1000" b="1">
                           <a:solidFill>
                             <a:srgbClr val="FFFFFF"/>
                           </a:solidFill>
@@ -13607,14 +13756,14 @@
                   </a:tcPr>
                 </a:tc>
               </a:tr>
-              <a:tr h="365760">
+              <a:tr h="265176">
                 <a:tc>
                   <a:txBody>
                     <a:bodyPr/>
                     <a:lstStyle/>
                     <a:p>
                       <a:r>
-                        <a:rPr sz="1050">
+                        <a:rPr sz="1000">
                           <a:solidFill>
                             <a:srgbClr val="222222"/>
                           </a:solidFill>
@@ -13636,7 +13785,7 @@
                     <a:lstStyle/>
                     <a:p>
                       <a:r>
-                        <a:rPr sz="1050">
+                        <a:rPr sz="1000">
                           <a:solidFill>
                             <a:srgbClr val="222222"/>
                           </a:solidFill>
@@ -13653,14 +13802,14 @@
                   </a:tcPr>
                 </a:tc>
               </a:tr>
-              <a:tr h="365760">
+              <a:tr h="265176">
                 <a:tc>
                   <a:txBody>
                     <a:bodyPr/>
                     <a:lstStyle/>
                     <a:p>
                       <a:r>
-                        <a:rPr sz="1050">
+                        <a:rPr sz="1000">
                           <a:solidFill>
                             <a:srgbClr val="222222"/>
                           </a:solidFill>
@@ -13682,7 +13831,7 @@
                     <a:lstStyle/>
                     <a:p>
                       <a:r>
-                        <a:rPr sz="1050">
+                        <a:rPr sz="1000">
                           <a:solidFill>
                             <a:srgbClr val="222222"/>
                           </a:solidFill>
@@ -13699,14 +13848,14 @@
                   </a:tcPr>
                 </a:tc>
               </a:tr>
-              <a:tr h="365760">
+              <a:tr h="265176">
                 <a:tc>
                   <a:txBody>
                     <a:bodyPr/>
                     <a:lstStyle/>
                     <a:p>
                       <a:r>
-                        <a:rPr sz="1050">
+                        <a:rPr sz="1000">
                           <a:solidFill>
                             <a:srgbClr val="222222"/>
                           </a:solidFill>
@@ -13728,7 +13877,7 @@
                     <a:lstStyle/>
                     <a:p>
                       <a:r>
-                        <a:rPr sz="1050">
+                        <a:rPr sz="1000">
                           <a:solidFill>
                             <a:srgbClr val="222222"/>
                           </a:solidFill>
@@ -13745,14 +13894,14 @@
                   </a:tcPr>
                 </a:tc>
               </a:tr>
-              <a:tr h="365760">
+              <a:tr h="265176">
                 <a:tc>
                   <a:txBody>
                     <a:bodyPr/>
                     <a:lstStyle/>
                     <a:p>
                       <a:r>
-                        <a:rPr sz="1050">
+                        <a:rPr sz="1000">
                           <a:solidFill>
                             <a:srgbClr val="222222"/>
                           </a:solidFill>
@@ -13774,7 +13923,7 @@
                     <a:lstStyle/>
                     <a:p>
                       <a:r>
-                        <a:rPr sz="1050">
+                        <a:rPr sz="1000">
                           <a:solidFill>
                             <a:srgbClr val="222222"/>
                           </a:solidFill>
@@ -13797,7 +13946,7 @@
       </p:graphicFrame>
       <p:sp>
         <p:nvSpPr>
-          <p:cNvPr id="18" name="TextBox 17"/>
+          <p:cNvPr id="21" name="TextBox 20"/>
           <p:cNvSpPr txBox="1"/>
           <p:nvPr/>
         </p:nvSpPr>
@@ -13832,7 +13981,7 @@
       </p:sp>
       <p:sp>
         <p:nvSpPr>
-          <p:cNvPr id="19" name="TextBox 18"/>
+          <p:cNvPr id="22" name="TextBox 21"/>
           <p:cNvSpPr txBox="1"/>
           <p:nvPr/>
         </p:nvSpPr>

--- a/docs/산출물_20260904/07_WCS_구성도_및_흐름도.pptx
+++ b/docs/산출물_20260904/07_WCS_구성도_및_흐름도.pptx
@@ -13569,21 +13569,56 @@
                 </a:solidFill>
                 <a:latin typeface="맑은 고딕"/>
               </a:rPr>
-              <a:t>⑤ 재고가 실제로 있는 셀로 상위가 새 출고를 지시</a:t>
-            </a:r>
-          </a:p>
-        </p:txBody>
-      </p:sp>
-      <p:sp>
-        <p:nvSpPr>
-          <p:cNvPr id="18" name="Rounded Rectangle 17"/>
+              <a:t>⑤ 운전자가 설비 조작반에서 크레인 에러를 해제한다</a:t>
+            </a:r>
+          </a:p>
+        </p:txBody>
+      </p:sp>
+      <p:sp>
+        <p:nvSpPr>
+          <p:cNvPr id="18" name="TextBox 17"/>
+          <p:cNvSpPr txBox="1"/>
+          <p:nvPr/>
+        </p:nvSpPr>
+        <p:spPr>
+          <a:xfrm>
+            <a:off x="6537960" y="3703320"/>
+            <a:ext cx="5212080" cy="347472"/>
+          </a:xfrm>
+          <a:prstGeom prst="rect">
+            <a:avLst/>
+          </a:prstGeom>
+          <a:noFill/>
+        </p:spPr>
+        <p:txBody>
+          <a:bodyPr wrap="square" anchor="t" lIns="36576" rIns="36576" tIns="0" bIns="0">
+            <a:spAutoFit/>
+          </a:bodyPr>
+          <a:lstStyle/>
+          <a:p>
+            <a:pPr algn="l"/>
+            <a:r>
+              <a:rPr sz="1100" b="0">
+                <a:solidFill>
+                  <a:srgbClr val="595959"/>
+                </a:solidFill>
+                <a:latin typeface="맑은 고딕"/>
+              </a:rPr>
+              <a:t>⑥ 재고가 실제로 있는 셀로 상위가 새 출고를 지시</a:t>
+            </a:r>
+          </a:p>
+        </p:txBody>
+      </p:sp>
+      <p:sp>
+        <p:nvSpPr>
+          <p:cNvPr id="19" name="Rounded Rectangle 18"/>
           <p:cNvSpPr/>
           <p:nvPr/>
         </p:nvSpPr>
         <p:spPr>
           <a:xfrm>
-            <a:off x="640080" y="3767328"/>
-            <a:ext cx="11109960" cy="786384"/>
+            <a:off x="640080" y="3913632"/>
+            <a:ext cx="11109960" cy="868680"/>
           </a:xfrm>
           <a:prstGeom prst="roundRect">
             <a:avLst/>
@@ -13648,6 +13683,18 @@
                 </a:solidFill>
                 <a:latin typeface="맑은 고딕"/>
               </a:rPr>
+              <a:t>이중입고는 재지정 지시가 들어가면서 설비가 스스로 풀지만, 공출고는 재지정이 없어 조작반에서 사람이 풀어야 한다.</a:t>
+            </a:r>
+          </a:p>
+          <a:p>
+            <a:pPr algn="ctr"/>
+            <a:r>
+              <a:rPr sz="1050" b="0">
+                <a:solidFill>
+                  <a:srgbClr val="595959"/>
+                </a:solidFill>
+                <a:latin typeface="맑은 고딕"/>
+              </a:rPr>
               <a:t>(참고) 구 ECS 소스에서 R 전문은 ACK 만 하고 실제 위치 변경 코드가 없다. 재지정 동작은 현행 WCS 에서 구현했다.</a:t>
             </a:r>
           </a:p>
@@ -13655,13 +13702,13 @@
       </p:sp>
       <p:sp>
         <p:nvSpPr>
-          <p:cNvPr id="19" name="TextBox 18"/>
+          <p:cNvPr id="20" name="TextBox 19"/>
           <p:cNvSpPr txBox="1"/>
           <p:nvPr/>
         </p:nvSpPr>
         <p:spPr>
           <a:xfrm>
-            <a:off x="640080" y="4663440"/>
+            <a:off x="640080" y="4864608"/>
             <a:ext cx="11064240" cy="365760"/>
           </a:xfrm>
           <a:prstGeom prst="rect">
@@ -13690,15 +13737,15 @@
       </p:sp>
       <p:graphicFrame>
         <p:nvGraphicFramePr>
-          <p:cNvPr id="20" name="Table 19"/>
+          <p:cNvPr id="21" name="Table 20"/>
           <p:cNvGraphicFramePr>
             <a:graphicFrameLocks noGrp="1"/>
           </p:cNvGraphicFramePr>
           <p:nvPr/>
         </p:nvGraphicFramePr>
         <p:xfrm>
-          <a:off x="640080" y="4983480"/>
-          <a:ext cx="11064240" cy="1325880"/>
+          <a:off x="640080" y="5138928"/>
+          <a:ext cx="11064240" cy="1097280"/>
         </p:xfrm>
         <a:graphic>
           <a:graphicData uri="http://schemas.openxmlformats.org/drawingml/2006/table">
@@ -13710,14 +13757,14 @@
                 <a:gridCol w="3931920"/>
                 <a:gridCol w="7132320"/>
               </a:tblGrid>
-              <a:tr h="265176">
+              <a:tr h="219456">
                 <a:tc>
                   <a:txBody>
                     <a:bodyPr/>
                     <a:lstStyle/>
                     <a:p>
                       <a:r>
-                        <a:rPr sz="1000" b="1">
+                        <a:rPr sz="900" b="1">
                           <a:solidFill>
                             <a:srgbClr val="FFFFFF"/>
                           </a:solidFill>
@@ -13739,7 +13786,7 @@
                     <a:lstStyle/>
                     <a:p>
                       <a:r>
-                        <a:rPr sz="1000" b="1">
+                        <a:rPr sz="900" b="1">
                           <a:solidFill>
                             <a:srgbClr val="FFFFFF"/>
                           </a:solidFill>
@@ -13756,14 +13803,14 @@
                   </a:tcPr>
                 </a:tc>
               </a:tr>
-              <a:tr h="265176">
+              <a:tr h="219456">
                 <a:tc>
                   <a:txBody>
                     <a:bodyPr/>
                     <a:lstStyle/>
                     <a:p>
                       <a:r>
-                        <a:rPr sz="1000">
+                        <a:rPr sz="900">
                           <a:solidFill>
                             <a:srgbClr val="222222"/>
                           </a:solidFill>
@@ -13785,7 +13832,7 @@
                     <a:lstStyle/>
                     <a:p>
                       <a:r>
-                        <a:rPr sz="1000">
+                        <a:rPr sz="900">
                           <a:solidFill>
                             <a:srgbClr val="222222"/>
                           </a:solidFill>
@@ -13802,14 +13849,14 @@
                   </a:tcPr>
                 </a:tc>
               </a:tr>
-              <a:tr h="265176">
+              <a:tr h="219456">
                 <a:tc>
                   <a:txBody>
                     <a:bodyPr/>
                     <a:lstStyle/>
                     <a:p>
                       <a:r>
-                        <a:rPr sz="1000">
+                        <a:rPr sz="900">
                           <a:solidFill>
                             <a:srgbClr val="222222"/>
                           </a:solidFill>
@@ -13831,7 +13878,7 @@
                     <a:lstStyle/>
                     <a:p>
                       <a:r>
-                        <a:rPr sz="1000">
+                        <a:rPr sz="900">
                           <a:solidFill>
                             <a:srgbClr val="222222"/>
                           </a:solidFill>
@@ -13848,14 +13895,14 @@
                   </a:tcPr>
                 </a:tc>
               </a:tr>
-              <a:tr h="265176">
+              <a:tr h="219456">
                 <a:tc>
                   <a:txBody>
                     <a:bodyPr/>
                     <a:lstStyle/>
                     <a:p>
                       <a:r>
-                        <a:rPr sz="1000">
+                        <a:rPr sz="900">
                           <a:solidFill>
                             <a:srgbClr val="222222"/>
                           </a:solidFill>
@@ -13877,7 +13924,7 @@
                     <a:lstStyle/>
                     <a:p>
                       <a:r>
-                        <a:rPr sz="1000">
+                        <a:rPr sz="900">
                           <a:solidFill>
                             <a:srgbClr val="222222"/>
                           </a:solidFill>
@@ -13894,14 +13941,14 @@
                   </a:tcPr>
                 </a:tc>
               </a:tr>
-              <a:tr h="265176">
+              <a:tr h="219456">
                 <a:tc>
                   <a:txBody>
                     <a:bodyPr/>
                     <a:lstStyle/>
                     <a:p>
                       <a:r>
-                        <a:rPr sz="1000">
+                        <a:rPr sz="900">
                           <a:solidFill>
                             <a:srgbClr val="222222"/>
                           </a:solidFill>
@@ -13923,7 +13970,7 @@
                     <a:lstStyle/>
                     <a:p>
                       <a:r>
-                        <a:rPr sz="1000">
+                        <a:rPr sz="900">
                           <a:solidFill>
                             <a:srgbClr val="222222"/>
                           </a:solidFill>
@@ -13946,7 +13993,7 @@
       </p:graphicFrame>
       <p:sp>
         <p:nvSpPr>
-          <p:cNvPr id="21" name="TextBox 20"/>
+          <p:cNvPr id="22" name="TextBox 21"/>
           <p:cNvSpPr txBox="1"/>
           <p:nvPr/>
         </p:nvSpPr>
@@ -13981,7 +14028,7 @@
       </p:sp>
       <p:sp>
         <p:nvSpPr>
-          <p:cNvPr id="22" name="TextBox 21"/>
+          <p:cNvPr id="23" name="TextBox 22"/>
           <p:cNvSpPr txBox="1"/>
           <p:nvPr/>
         </p:nvSpPr>
